--- a/assets/powerpoints/module-n2-couloirs/A2-quatorze-ou-quarante.pptx
+++ b/assets/powerpoints/module-n2-couloirs/A2-quatorze-ou-quarante.pptx
@@ -8905,7 +8905,25 @@
                 </a:solidFill>
                 <a:latin typeface="Verdana"/>
               </a:rPr>
-              <a:t>Un élève qui construit « deux-ze » pour douze ne sera jamais compris. Ces six nombres s'apprennent par cœur, comme six mots de vocabulaire. À partir de &lt;b&gt;dix-sept&lt;/b&gt;, la règle change et le nombre se construit vraiment.</a:t>
+              <a:t>Un élève qui construit « deux-ze » pour douze ne sera jamais compris. Ces six nombres s'apprennent par cœur, comme six mots de vocabulaire. À partir de </a:t>
+            </a:r>
+            <a:r>
+              <a:rPr sz="2000" b="1" i="0">
+                <a:solidFill>
+                  <a:srgbClr val="4B4F52"/>
+                </a:solidFill>
+                <a:latin typeface="Verdana"/>
+              </a:rPr>
+              <a:t>dix-sept</a:t>
+            </a:r>
+            <a:r>
+              <a:rPr sz="2000" b="0" i="0">
+                <a:solidFill>
+                  <a:srgbClr val="4B4F52"/>
+                </a:solidFill>
+                <a:latin typeface="Verdana"/>
+              </a:rPr>
+              <a:t>, la règle change et le nombre se construit vraiment.</a:t>
             </a:r>
           </a:p>
         </p:txBody>
@@ -9454,7 +9472,43 @@
                 </a:solidFill>
                 <a:latin typeface="Verdana"/>
               </a:rPr>
-              <a:t>Quator&lt;b&gt;ze&lt;/b&gt; est 14, quaran&lt;b&gt;te&lt;/b&gt; est 40, et le mot « quaranze » n'existe pas. Au Centre Bellevue, le 214 existe et le 240 n'existe pas : c'est exactement l'erreur que Soraya fait, et elle monte un étage pour rien.</a:t>
+              <a:t>Quator</a:t>
+            </a:r>
+            <a:r>
+              <a:rPr sz="2000" b="1" i="0">
+                <a:solidFill>
+                  <a:srgbClr val="4B4F52"/>
+                </a:solidFill>
+                <a:latin typeface="Verdana"/>
+              </a:rPr>
+              <a:t>ze</a:t>
+            </a:r>
+            <a:r>
+              <a:rPr sz="2000" b="0" i="0">
+                <a:solidFill>
+                  <a:srgbClr val="4B4F52"/>
+                </a:solidFill>
+                <a:latin typeface="Verdana"/>
+              </a:rPr>
+              <a:t> est 14, quaran</a:t>
+            </a:r>
+            <a:r>
+              <a:rPr sz="2000" b="1" i="0">
+                <a:solidFill>
+                  <a:srgbClr val="4B4F52"/>
+                </a:solidFill>
+                <a:latin typeface="Verdana"/>
+              </a:rPr>
+              <a:t>te</a:t>
+            </a:r>
+            <a:r>
+              <a:rPr sz="2000" b="0" i="0">
+                <a:solidFill>
+                  <a:srgbClr val="4B4F52"/>
+                </a:solidFill>
+                <a:latin typeface="Verdana"/>
+              </a:rPr>
+              <a:t> est 40, et le mot « quaranze » n'existe pas. Au Centre Bellevue, le 214 existe et le 240 n'existe pas : c'est exactement l'erreur que Soraya fait, et elle monte un étage pour rien.</a:t>
             </a:r>
           </a:p>
         </p:txBody>
